--- a/assets/pptx/catalog-551.pptx
+++ b/assets/pptx/catalog-551.pptx
@@ -3824,61 +3824,61 @@
                 <a:ea typeface="Ebrima"/>
                 <a:cs typeface="Ebrima"/>
               </a:rPr>
-              <a:t>እኔን የሚገርመኝ ኢየሱስ (3x)</a:t>
-            </a:r>
-          </a:p>
-          <a:p>
-            <a:pPr algn="ctr">
-              <a:lnSpc>
-                <a:spcPct val="125000"/>
-              </a:lnSpc>
-            </a:pPr>
-            <a:r>
-              <a:rPr sz="4000" b="0">
-                <a:solidFill>
-                  <a:srgbClr val="FFFFFF"/>
-                </a:solidFill>
-                <a:latin typeface="Ebrima"/>
-                <a:ea typeface="Ebrima"/>
-                <a:cs typeface="Ebrima"/>
-              </a:rPr>
-              <a:t>እኔን የሚደንቀኝ ኢየሱስ (3x)</a:t>
-            </a:r>
-          </a:p>
-          <a:p>
-            <a:pPr algn="ctr">
-              <a:lnSpc>
-                <a:spcPct val="125000"/>
-              </a:lnSpc>
-            </a:pPr>
-            <a:r>
-              <a:rPr sz="4000" b="0">
-                <a:solidFill>
-                  <a:srgbClr val="FFFFFF"/>
-                </a:solidFill>
-                <a:latin typeface="Ebrima"/>
-                <a:ea typeface="Ebrima"/>
-                <a:cs typeface="Ebrima"/>
-              </a:rPr>
-              <a:t>ለእኔ ብርቅ የምለው ኢየሱስ (3x)</a:t>
-            </a:r>
-          </a:p>
-          <a:p>
-            <a:pPr algn="ctr">
-              <a:lnSpc>
-                <a:spcPct val="125000"/>
-              </a:lnSpc>
-            </a:pPr>
-            <a:r>
-              <a:rPr sz="4000" b="0">
-                <a:solidFill>
-                  <a:srgbClr val="FFFFFF"/>
-                </a:solidFill>
-                <a:latin typeface="Ebrima"/>
-                <a:ea typeface="Ebrima"/>
-                <a:cs typeface="Ebrima"/>
-              </a:rPr>
-              <a:t>ለእኔ ውድ የምለው ኢየሱስ (3x)</a:t>
+              <a:t>እኔን የሚገርመኝ ኢየሱስ 3x</a:t>
+            </a:r>
+          </a:p>
+          <a:p>
+            <a:pPr algn="ctr">
+              <a:lnSpc>
+                <a:spcPct val="125000"/>
+              </a:lnSpc>
+            </a:pPr>
+            <a:r>
+              <a:rPr sz="4000" b="0">
+                <a:solidFill>
+                  <a:srgbClr val="FFFFFF"/>
+                </a:solidFill>
+                <a:latin typeface="Ebrima"/>
+                <a:ea typeface="Ebrima"/>
+                <a:cs typeface="Ebrima"/>
+              </a:rPr>
+              <a:t>እኔን የሚደንቀኝ ኢየሱስ 3x</a:t>
+            </a:r>
+          </a:p>
+          <a:p>
+            <a:pPr algn="ctr">
+              <a:lnSpc>
+                <a:spcPct val="125000"/>
+              </a:lnSpc>
+            </a:pPr>
+            <a:r>
+              <a:rPr sz="4000" b="0">
+                <a:solidFill>
+                  <a:srgbClr val="FFFFFF"/>
+                </a:solidFill>
+                <a:latin typeface="Ebrima"/>
+                <a:ea typeface="Ebrima"/>
+                <a:cs typeface="Ebrima"/>
+              </a:rPr>
+              <a:t>ለእኔ ብርቅ የምለው ኢየሱስ 3x</a:t>
+            </a:r>
+          </a:p>
+          <a:p>
+            <a:pPr algn="ctr">
+              <a:lnSpc>
+                <a:spcPct val="125000"/>
+              </a:lnSpc>
+            </a:pPr>
+            <a:r>
+              <a:rPr sz="4000" b="0">
+                <a:solidFill>
+                  <a:srgbClr val="FFFFFF"/>
+                </a:solidFill>
+                <a:latin typeface="Ebrima"/>
+                <a:ea typeface="Ebrima"/>
+                <a:cs typeface="Ebrima"/>
+              </a:rPr>
+              <a:t>ለእኔ ውድ የምለው ኢየሱስ 3x</a:t>
             </a:r>
           </a:p>
         </p:txBody>
@@ -4308,61 +4308,61 @@
                 <a:ea typeface="Ebrima"/>
                 <a:cs typeface="Ebrima"/>
               </a:rPr>
-              <a:t>ልብን የሚፈውስ ኢየሱስ (3x)</a:t>
-            </a:r>
-          </a:p>
-          <a:p>
-            <a:pPr algn="ctr">
-              <a:lnSpc>
-                <a:spcPct val="125000"/>
-              </a:lnSpc>
-            </a:pPr>
-            <a:r>
-              <a:rPr sz="4000" b="0">
-                <a:solidFill>
-                  <a:srgbClr val="FFFFFF"/>
-                </a:solidFill>
-                <a:latin typeface="Ebrima"/>
-                <a:ea typeface="Ebrima"/>
-                <a:cs typeface="Ebrima"/>
-              </a:rPr>
-              <a:t>ነፍስን የሚያረካ ኢየሱስ (3x)</a:t>
-            </a:r>
-          </a:p>
-          <a:p>
-            <a:pPr algn="ctr">
-              <a:lnSpc>
-                <a:spcPct val="125000"/>
-              </a:lnSpc>
-            </a:pPr>
-            <a:r>
-              <a:rPr sz="4000" b="0">
-                <a:solidFill>
-                  <a:srgbClr val="FFFFFF"/>
-                </a:solidFill>
-                <a:latin typeface="Ebrima"/>
-                <a:ea typeface="Ebrima"/>
-                <a:cs typeface="Ebrima"/>
-              </a:rPr>
-              <a:t>ዘለዓለም የሚኖር ኢየሱስ (3x)</a:t>
-            </a:r>
-          </a:p>
-          <a:p>
-            <a:pPr algn="ctr">
-              <a:lnSpc>
-                <a:spcPct val="125000"/>
-              </a:lnSpc>
-            </a:pPr>
-            <a:r>
-              <a:rPr sz="4000" b="0">
-                <a:solidFill>
-                  <a:srgbClr val="FFFFFF"/>
-                </a:solidFill>
-                <a:latin typeface="Ebrima"/>
-                <a:ea typeface="Ebrima"/>
-                <a:cs typeface="Ebrima"/>
-              </a:rPr>
-              <a:t>የሰው ሁሉ ወዳጅ ኢየሱስ (3x)</a:t>
+              <a:t>ልብን የሚፈውስ ኢየሱስ 3x</a:t>
+            </a:r>
+          </a:p>
+          <a:p>
+            <a:pPr algn="ctr">
+              <a:lnSpc>
+                <a:spcPct val="125000"/>
+              </a:lnSpc>
+            </a:pPr>
+            <a:r>
+              <a:rPr sz="4000" b="0">
+                <a:solidFill>
+                  <a:srgbClr val="FFFFFF"/>
+                </a:solidFill>
+                <a:latin typeface="Ebrima"/>
+                <a:ea typeface="Ebrima"/>
+                <a:cs typeface="Ebrima"/>
+              </a:rPr>
+              <a:t>ነፍስን የሚያረካ ኢየሱስ 3x</a:t>
+            </a:r>
+          </a:p>
+          <a:p>
+            <a:pPr algn="ctr">
+              <a:lnSpc>
+                <a:spcPct val="125000"/>
+              </a:lnSpc>
+            </a:pPr>
+            <a:r>
+              <a:rPr sz="4000" b="0">
+                <a:solidFill>
+                  <a:srgbClr val="FFFFFF"/>
+                </a:solidFill>
+                <a:latin typeface="Ebrima"/>
+                <a:ea typeface="Ebrima"/>
+                <a:cs typeface="Ebrima"/>
+              </a:rPr>
+              <a:t>ዘለዓለም የሚኖር ኢየሱስ 3x</a:t>
+            </a:r>
+          </a:p>
+          <a:p>
+            <a:pPr algn="ctr">
+              <a:lnSpc>
+                <a:spcPct val="125000"/>
+              </a:lnSpc>
+            </a:pPr>
+            <a:r>
+              <a:rPr sz="4000" b="0">
+                <a:solidFill>
+                  <a:srgbClr val="FFFFFF"/>
+                </a:solidFill>
+                <a:latin typeface="Ebrima"/>
+                <a:ea typeface="Ebrima"/>
+                <a:cs typeface="Ebrima"/>
+              </a:rPr>
+              <a:t>የሰው ሁሉ ወዳጅ ኢየሱስ 3x</a:t>
             </a:r>
           </a:p>
         </p:txBody>
@@ -4877,61 +4877,61 @@
                 <a:ea typeface="Ebrima"/>
                 <a:cs typeface="Ebrima"/>
               </a:rPr>
-              <a:t>እኔን የሚርመኝ ኢየሱስ (3x)</a:t>
-            </a:r>
-          </a:p>
-          <a:p>
-            <a:pPr algn="ctr">
-              <a:lnSpc>
-                <a:spcPct val="125000"/>
-              </a:lnSpc>
-            </a:pPr>
-            <a:r>
-              <a:rPr sz="4000" b="0">
-                <a:solidFill>
-                  <a:srgbClr val="FFFFFF"/>
-                </a:solidFill>
-                <a:latin typeface="Ebrima"/>
-                <a:ea typeface="Ebrima"/>
-                <a:cs typeface="Ebrima"/>
-              </a:rPr>
-              <a:t>እኔን የሚደንቀኝ ኢየሱስ (3x)</a:t>
-            </a:r>
-          </a:p>
-          <a:p>
-            <a:pPr algn="ctr">
-              <a:lnSpc>
-                <a:spcPct val="125000"/>
-              </a:lnSpc>
-            </a:pPr>
-            <a:r>
-              <a:rPr sz="4000" b="0">
-                <a:solidFill>
-                  <a:srgbClr val="FFFFFF"/>
-                </a:solidFill>
-                <a:latin typeface="Ebrima"/>
-                <a:ea typeface="Ebrima"/>
-                <a:cs typeface="Ebrima"/>
-              </a:rPr>
-              <a:t>ለእኔ ብርቅ የምለው ኢየሱስ (3x)</a:t>
-            </a:r>
-          </a:p>
-          <a:p>
-            <a:pPr algn="ctr">
-              <a:lnSpc>
-                <a:spcPct val="125000"/>
-              </a:lnSpc>
-            </a:pPr>
-            <a:r>
-              <a:rPr sz="4000" b="0">
-                <a:solidFill>
-                  <a:srgbClr val="FFFFFF"/>
-                </a:solidFill>
-                <a:latin typeface="Ebrima"/>
-                <a:ea typeface="Ebrima"/>
-                <a:cs typeface="Ebrima"/>
-              </a:rPr>
-              <a:t>ለእኔ ውድ የምለው ኢየሱስ (3x)</a:t>
+              <a:t>እኔን የሚርመኝ ኢየሱስ 3x</a:t>
+            </a:r>
+          </a:p>
+          <a:p>
+            <a:pPr algn="ctr">
+              <a:lnSpc>
+                <a:spcPct val="125000"/>
+              </a:lnSpc>
+            </a:pPr>
+            <a:r>
+              <a:rPr sz="4000" b="0">
+                <a:solidFill>
+                  <a:srgbClr val="FFFFFF"/>
+                </a:solidFill>
+                <a:latin typeface="Ebrima"/>
+                <a:ea typeface="Ebrima"/>
+                <a:cs typeface="Ebrima"/>
+              </a:rPr>
+              <a:t>እኔን የሚደንቀኝ ኢየሱስ 3x</a:t>
+            </a:r>
+          </a:p>
+          <a:p>
+            <a:pPr algn="ctr">
+              <a:lnSpc>
+                <a:spcPct val="125000"/>
+              </a:lnSpc>
+            </a:pPr>
+            <a:r>
+              <a:rPr sz="4000" b="0">
+                <a:solidFill>
+                  <a:srgbClr val="FFFFFF"/>
+                </a:solidFill>
+                <a:latin typeface="Ebrima"/>
+                <a:ea typeface="Ebrima"/>
+                <a:cs typeface="Ebrima"/>
+              </a:rPr>
+              <a:t>ለእኔ ብርቅ የምለው ኢየሱስ 3x</a:t>
+            </a:r>
+          </a:p>
+          <a:p>
+            <a:pPr algn="ctr">
+              <a:lnSpc>
+                <a:spcPct val="125000"/>
+              </a:lnSpc>
+            </a:pPr>
+            <a:r>
+              <a:rPr sz="4000" b="0">
+                <a:solidFill>
+                  <a:srgbClr val="FFFFFF"/>
+                </a:solidFill>
+                <a:latin typeface="Ebrima"/>
+                <a:ea typeface="Ebrima"/>
+                <a:cs typeface="Ebrima"/>
+              </a:rPr>
+              <a:t>ለእኔ ውድ የምለው ኢየሱስ 3x</a:t>
             </a:r>
           </a:p>
         </p:txBody>
